--- a/BaiTap_PhanTichTamLyHoc/Nhom_PhanTichTamLyHoc_StudentDepression.pptx
+++ b/BaiTap_PhanTichTamLyHoc/Nhom_PhanTichTamLyHoc_StudentDepression.pptx
@@ -126,26 +126,26 @@
   <p:extLst>
     <p:ext uri="{521415D9-36F7-43E2-AB2F-B90AF26B5E84}">
       <p14:sectionLst xmlns:p14="http://schemas.microsoft.com/office/powerpoint/2010/main">
-        <p14:section name="Mở đầu" id="{75081d77-6a1e-35be-a9a5-d0e465c30208}">
+        <p14:section name="Mở đầu" id="{bd89b4ed-c8ed-c0f6-90d1-d7abf6d22453}">
           <p14:sldIdLst>
             <p14:sldId id="256"/>
             <p14:sldId id="257"/>
           </p14:sldIdLst>
         </p14:section>
-        <p14:section name="Bộ dữ liệu" id="{24c1a471-2754-bbce-7406-df7803f60760}">
+        <p14:section name="Bộ dữ liệu" id="{c10e9cc8-f04e-8a60-d91d-774dd5345829}">
           <p14:sldIdLst>
             <p14:sldId id="258"/>
             <p14:sldId id="259"/>
           </p14:sldIdLst>
         </p14:section>
-        <p14:section name="Tiền xử lý" id="{66124c5c-44c3-0045-f168-1b2d084a8e62}">
+        <p14:section name="Tiền xử lý" id="{8de12c71-f8a5-554c-3bd5-894b21d0c98f}">
           <p14:sldIdLst>
             <p14:sldId id="260"/>
             <p14:sldId id="261"/>
             <p14:sldId id="262"/>
           </p14:sldIdLst>
         </p14:section>
-        <p14:section name="Kết quả phân tích" id="{29213a28-9579-12f9-1075-e3d2285d30fb}">
+        <p14:section name="Kết quả phân tích" id="{afccbf8c-6eca-4c22-1955-9641b209720c}">
           <p14:sldIdLst>
             <p14:sldId id="263"/>
             <p14:sldId id="264"/>
@@ -157,7 +157,7 @@
             <p14:sldId id="270"/>
           </p14:sldIdLst>
         </p14:section>
-        <p14:section name="Nhận định &amp; Đề xuất" id="{b8646b70-46c4-02a9-d3a6-ad7079c15ef0}">
+        <p14:section name="Nhận định &amp; Đề xuất" id="{68714cc4-f78e-3c94-49d4-8ca4d8c1cd17}">
           <p14:sldIdLst>
             <p14:sldId id="271"/>
             <p14:sldId id="272"/>
@@ -165,7 +165,7 @@
             <p14:sldId id="274"/>
           </p14:sldIdLst>
         </p14:section>
-        <p14:section name="Kết thúc" id="{4e1f097e-7116-9b02-7140-27ea456576f3}">
+        <p14:section name="Kết thúc" id="{c8590ede-b3e4-4b66-b8e3-245463f4aa5d}">
           <p14:sldIdLst>
             <p14:sldId id="275"/>
           </p14:sldIdLst>
@@ -3453,7 +3453,53 @@
       </p:grpSpPr>
       <p:sp>
         <p:nvSpPr>
-          <p:cNvPr id="2" name="Text 1"/>
+          <p:cNvPr id="2" name="hutech_card"/>
+          <p:cNvSpPr/>
+          <p:nvPr/>
+        </p:nvSpPr>
+        <p:spPr>
+          <a:xfrm>
+            <a:off x="841248" y="475488"/>
+            <a:ext cx="2395728" cy="713232"/>
+          </a:xfrm>
+          <a:prstGeom prst="roundRect">
+            <a:avLst>
+              <a:gd name="adj" fmla="val 10256"/>
+            </a:avLst>
+          </a:prstGeom>
+          <a:solidFill>
+            <a:srgbClr val="FFFFFF"/>
+          </a:solidFill>
+          <a:ln/>
+        </p:spPr>
+      </p:sp>
+      <p:pic>
+        <p:nvPicPr>
+          <p:cNvPr id="3" name="Image 0" descr="/tmp/claude-0/-home-user-about/7f9787d4-c743-5828-973b-7494043f4138/scratchpad/deck/img/hutech_ngang.png">    </p:cNvPr>
+          <p:cNvPicPr>
+            <a:picLocks noChangeAspect="1"/>
+          </p:cNvPicPr>
+          <p:nvPr/>
+        </p:nvPicPr>
+        <p:blipFill>
+          <a:blip r:embed="rId1"/>
+          <a:stretch>
+            <a:fillRect/>
+          </a:stretch>
+        </p:blipFill>
+        <p:spPr>
+          <a:xfrm>
+            <a:off x="969264" y="621792"/>
+            <a:ext cx="2139696" cy="420624"/>
+          </a:xfrm>
+          <a:prstGeom prst="rect">
+            <a:avLst/>
+          </a:prstGeom>
+        </p:spPr>
+      </p:pic>
+      <p:sp>
+        <p:nvSpPr>
+          <p:cNvPr id="4" name="Text 1"/>
           <p:cNvSpPr txBox="1"/>
           <p:nvPr>
             <p:ph idx="101" type="body" hasCustomPrompt="1"/>
@@ -3491,7 +3537,7 @@
       </p:sp>
       <p:sp>
         <p:nvSpPr>
-          <p:cNvPr id="3" name="Text 1"/>
+          <p:cNvPr id="5" name="Text 1"/>
           <p:cNvSpPr txBox="1"/>
           <p:nvPr>
             <p:ph idx="102" type="title" hasCustomPrompt="1"/>
@@ -3529,7 +3575,7 @@
       </p:sp>
       <p:sp>
         <p:nvSpPr>
-          <p:cNvPr id="4" name="Text 1"/>
+          <p:cNvPr id="6" name="Text 1"/>
           <p:cNvSpPr txBox="1"/>
           <p:nvPr>
             <p:ph idx="103" type="body" hasCustomPrompt="1"/>
@@ -3581,7 +3627,7 @@
       </p:sp>
       <p:sp>
         <p:nvSpPr>
-          <p:cNvPr id="5" name="card_1"/>
+          <p:cNvPr id="7" name="card_1"/>
           <p:cNvSpPr/>
           <p:nvPr/>
         </p:nvSpPr>
@@ -3603,7 +3649,7 @@
       </p:sp>
       <p:sp>
         <p:nvSpPr>
-          <p:cNvPr id="6" name="Text 4"/>
+          <p:cNvPr id="8" name="Text 5"/>
           <p:cNvSpPr txBox="1"/>
           <p:nvPr/>
         </p:nvSpPr>
@@ -3639,7 +3685,7 @@
       </p:sp>
       <p:sp>
         <p:nvSpPr>
-          <p:cNvPr id="7" name="Text 5"/>
+          <p:cNvPr id="9" name="Text 6"/>
           <p:cNvSpPr txBox="1"/>
           <p:nvPr/>
         </p:nvSpPr>
